--- a/documentazione/Presentazione_progetto_StudySpace_Elisa_Julie.pptx
+++ b/documentazione/Presentazione_progetto_StudySpace_Elisa_Julie.pptx
@@ -5,7 +5,7 @@
     <p:sldMasterId id="2147483659" r:id="rId1"/>
   </p:sldMasterIdLst>
   <p:notesMasterIdLst>
-    <p:notesMasterId r:id="rId17"/>
+    <p:notesMasterId r:id="rId18"/>
   </p:notesMasterIdLst>
   <p:sldIdLst>
     <p:sldId id="256" r:id="rId2"/>
@@ -14,38 +14,39 @@
     <p:sldId id="259" r:id="rId5"/>
     <p:sldId id="260" r:id="rId6"/>
     <p:sldId id="272" r:id="rId7"/>
-    <p:sldId id="261" r:id="rId8"/>
-    <p:sldId id="262" r:id="rId9"/>
-    <p:sldId id="263" r:id="rId10"/>
-    <p:sldId id="264" r:id="rId11"/>
-    <p:sldId id="265" r:id="rId12"/>
-    <p:sldId id="270" r:id="rId13"/>
-    <p:sldId id="269" r:id="rId14"/>
-    <p:sldId id="271" r:id="rId15"/>
-    <p:sldId id="267" r:id="rId16"/>
+    <p:sldId id="273" r:id="rId8"/>
+    <p:sldId id="261" r:id="rId9"/>
+    <p:sldId id="262" r:id="rId10"/>
+    <p:sldId id="263" r:id="rId11"/>
+    <p:sldId id="264" r:id="rId12"/>
+    <p:sldId id="265" r:id="rId13"/>
+    <p:sldId id="270" r:id="rId14"/>
+    <p:sldId id="269" r:id="rId15"/>
+    <p:sldId id="271" r:id="rId16"/>
+    <p:sldId id="267" r:id="rId17"/>
   </p:sldIdLst>
   <p:sldSz cx="12192000" cy="6858000"/>
   <p:notesSz cx="6858000" cy="9144000"/>
   <p:embeddedFontLst>
     <p:embeddedFont>
       <p:font typeface="JetBrains Mono" panose="02000009000000000000" pitchFamily="49" charset="0"/>
-      <p:regular r:id="rId18"/>
-      <p:bold r:id="rId19"/>
-      <p:italic r:id="rId20"/>
-      <p:boldItalic r:id="rId21"/>
+      <p:regular r:id="rId19"/>
+      <p:bold r:id="rId20"/>
+      <p:italic r:id="rId21"/>
+      <p:boldItalic r:id="rId22"/>
     </p:embeddedFont>
     <p:embeddedFont>
       <p:font typeface="Plus Jakarta Sans" pitchFamily="2" charset="77"/>
-      <p:regular r:id="rId22"/>
-      <p:bold r:id="rId23"/>
-      <p:italic r:id="rId24"/>
-      <p:boldItalic r:id="rId25"/>
+      <p:regular r:id="rId23"/>
+      <p:bold r:id="rId24"/>
+      <p:italic r:id="rId25"/>
+      <p:boldItalic r:id="rId26"/>
     </p:embeddedFont>
     <p:embeddedFont>
       <p:font typeface="Plus Jakarta Sans ExtraBold" pitchFamily="2" charset="77"/>
-      <p:bold r:id="rId26"/>
-      <p:italic r:id="rId27"/>
-      <p:boldItalic r:id="rId28"/>
+      <p:bold r:id="rId27"/>
+      <p:italic r:id="rId28"/>
+      <p:boldItalic r:id="rId29"/>
     </p:embeddedFont>
   </p:embeddedFontLst>
   <p:defaultTextStyle>
@@ -846,6 +847,110 @@
   <p:cSld>
     <p:spTree>
       <p:nvGrpSpPr>
+        <p:cNvPr id="1" name="Shape 173"/>
+        <p:cNvGrpSpPr/>
+        <p:nvPr/>
+      </p:nvGrpSpPr>
+      <p:grpSpPr>
+        <a:xfrm>
+          <a:off x="0" y="0"/>
+          <a:ext cx="0" cy="0"/>
+          <a:chOff x="0" y="0"/>
+          <a:chExt cx="0" cy="0"/>
+        </a:xfrm>
+      </p:grpSpPr>
+      <p:sp>
+        <p:nvSpPr>
+          <p:cNvPr id="174" name="Google Shape;174;p8:notes"/>
+          <p:cNvSpPr txBox="1">
+            <a:spLocks noGrp="1"/>
+          </p:cNvSpPr>
+          <p:nvPr>
+            <p:ph type="body" idx="1"/>
+          </p:nvPr>
+        </p:nvSpPr>
+        <p:spPr>
+          <a:xfrm>
+            <a:off x="685800" y="4343400"/>
+            <a:ext cx="5486400" cy="4114800"/>
+          </a:xfrm>
+          <a:prstGeom prst="rect">
+            <a:avLst/>
+          </a:prstGeom>
+        </p:spPr>
+        <p:txBody>
+          <a:bodyPr spcFirstLastPara="1" wrap="square" lIns="91425" tIns="91425" rIns="91425" bIns="91425" anchor="t" anchorCtr="0">
+            <a:noAutofit/>
+          </a:bodyPr>
+          <a:lstStyle/>
+          <a:p>
+            <a:pPr marL="0" lvl="0" indent="0" algn="l" rtl="0">
+              <a:spcBef>
+                <a:spcPts val="0"/>
+              </a:spcBef>
+              <a:spcAft>
+                <a:spcPts val="0"/>
+              </a:spcAft>
+              <a:buNone/>
+            </a:pPr>
+            <a:endParaRPr/>
+          </a:p>
+        </p:txBody>
+      </p:sp>
+      <p:sp>
+        <p:nvSpPr>
+          <p:cNvPr id="175" name="Google Shape;175;p8:notes"/>
+          <p:cNvSpPr>
+            <a:spLocks noGrp="1" noRot="1" noChangeAspect="1"/>
+          </p:cNvSpPr>
+          <p:nvPr>
+            <p:ph type="sldImg" idx="2"/>
+          </p:nvPr>
+        </p:nvSpPr>
+        <p:spPr>
+          <a:xfrm>
+            <a:off x="381000" y="685800"/>
+            <a:ext cx="6096000" cy="3429000"/>
+          </a:xfrm>
+          <a:custGeom>
+            <a:avLst/>
+            <a:gdLst/>
+            <a:ahLst/>
+            <a:cxnLst/>
+            <a:rect l="l" t="t" r="r" b="b"/>
+            <a:pathLst>
+              <a:path w="120000" h="120000" extrusionOk="0">
+                <a:moveTo>
+                  <a:pt x="0" y="0"/>
+                </a:moveTo>
+                <a:lnTo>
+                  <a:pt x="120000" y="0"/>
+                </a:lnTo>
+                <a:lnTo>
+                  <a:pt x="120000" y="120000"/>
+                </a:lnTo>
+                <a:lnTo>
+                  <a:pt x="0" y="120000"/>
+                </a:lnTo>
+                <a:close/>
+              </a:path>
+            </a:pathLst>
+          </a:custGeom>
+        </p:spPr>
+      </p:sp>
+    </p:spTree>
+  </p:cSld>
+  <p:clrMapOvr>
+    <a:masterClrMapping/>
+  </p:clrMapOvr>
+</p:notes>
+</file>
+
+<file path=ppt/notesSlides/notesSlide11.xml><?xml version="1.0" encoding="utf-8"?>
+<p:notes xmlns:a="http://schemas.openxmlformats.org/drawingml/2006/main" xmlns:r="http://schemas.openxmlformats.org/officeDocument/2006/relationships" xmlns:p="http://schemas.openxmlformats.org/presentationml/2006/main" showMasterSp="0" showMasterPhAnim="0">
+  <p:cSld>
+    <p:spTree>
+      <p:nvGrpSpPr>
         <p:cNvPr id="1" name="Shape 189"/>
         <p:cNvGrpSpPr/>
         <p:nvPr/>
@@ -945,7 +1050,7 @@
 </p:notes>
 </file>
 
-<file path=ppt/notesSlides/notesSlide11.xml><?xml version="1.0" encoding="utf-8"?>
+<file path=ppt/notesSlides/notesSlide12.xml><?xml version="1.0" encoding="utf-8"?>
 <p:notes xmlns:a="http://schemas.openxmlformats.org/drawingml/2006/main" xmlns:r="http://schemas.openxmlformats.org/officeDocument/2006/relationships" xmlns:p="http://schemas.openxmlformats.org/presentationml/2006/main" showMasterSp="0" showMasterPhAnim="0">
   <p:cSld>
     <p:spTree>
@@ -1049,7 +1154,7 @@
 </p:notes>
 </file>
 
-<file path=ppt/notesSlides/notesSlide12.xml><?xml version="1.0" encoding="utf-8"?>
+<file path=ppt/notesSlides/notesSlide13.xml><?xml version="1.0" encoding="utf-8"?>
 <p:notes xmlns:a="http://schemas.openxmlformats.org/drawingml/2006/main" xmlns:r="http://schemas.openxmlformats.org/officeDocument/2006/relationships" xmlns:p="http://schemas.openxmlformats.org/presentationml/2006/main" showMasterSp="0" showMasterPhAnim="0">
   <p:cSld>
     <p:spTree>
@@ -1176,7 +1281,7 @@
 </p:notes>
 </file>
 
-<file path=ppt/notesSlides/notesSlide13.xml><?xml version="1.0" encoding="utf-8"?>
+<file path=ppt/notesSlides/notesSlide14.xml><?xml version="1.0" encoding="utf-8"?>
 <p:notes xmlns:a="http://schemas.openxmlformats.org/drawingml/2006/main" xmlns:r="http://schemas.openxmlformats.org/officeDocument/2006/relationships" xmlns:p="http://schemas.openxmlformats.org/presentationml/2006/main" showMasterSp="0" showMasterPhAnim="0">
   <p:cSld>
     <p:spTree>
@@ -1303,7 +1408,7 @@
 </p:notes>
 </file>
 
-<file path=ppt/notesSlides/notesSlide14.xml><?xml version="1.0" encoding="utf-8"?>
+<file path=ppt/notesSlides/notesSlide15.xml><?xml version="1.0" encoding="utf-8"?>
 <p:notes xmlns:a="http://schemas.openxmlformats.org/drawingml/2006/main" xmlns:r="http://schemas.openxmlformats.org/officeDocument/2006/relationships" xmlns:p="http://schemas.openxmlformats.org/presentationml/2006/main" showMasterSp="0" showMasterPhAnim="0">
   <p:cSld>
     <p:spTree>
@@ -1430,7 +1535,7 @@
 </p:notes>
 </file>
 
-<file path=ppt/notesSlides/notesSlide15.xml><?xml version="1.0" encoding="utf-8"?>
+<file path=ppt/notesSlides/notesSlide16.xml><?xml version="1.0" encoding="utf-8"?>
 <p:notes xmlns:a="http://schemas.openxmlformats.org/drawingml/2006/main" xmlns:r="http://schemas.openxmlformats.org/officeDocument/2006/relationships" xmlns:p="http://schemas.openxmlformats.org/presentationml/2006/main" showMasterSp="0" showMasterPhAnim="0">
   <p:cSld>
     <p:spTree>
@@ -2082,6 +2187,133 @@
   <p:cSld>
     <p:spTree>
       <p:nvGrpSpPr>
+        <p:cNvPr id="1" name="Shape 156">
+          <a:extLst>
+            <a:ext uri="{FF2B5EF4-FFF2-40B4-BE49-F238E27FC236}">
+              <a16:creationId xmlns:a16="http://schemas.microsoft.com/office/drawing/2014/main" id="{EF06DBC1-96F7-D00E-FEF6-489348D57D30}"/>
+            </a:ext>
+          </a:extLst>
+        </p:cNvPr>
+        <p:cNvGrpSpPr/>
+        <p:nvPr/>
+      </p:nvGrpSpPr>
+      <p:grpSpPr>
+        <a:xfrm>
+          <a:off x="0" y="0"/>
+          <a:ext cx="0" cy="0"/>
+          <a:chOff x="0" y="0"/>
+          <a:chExt cx="0" cy="0"/>
+        </a:xfrm>
+      </p:grpSpPr>
+      <p:sp>
+        <p:nvSpPr>
+          <p:cNvPr id="157" name="Google Shape;157;p6:notes">
+            <a:extLst>
+              <a:ext uri="{FF2B5EF4-FFF2-40B4-BE49-F238E27FC236}">
+                <a16:creationId xmlns:a16="http://schemas.microsoft.com/office/drawing/2014/main" id="{163BCB6C-B9BE-C675-34CD-7459ABE2CDA0}"/>
+              </a:ext>
+            </a:extLst>
+          </p:cNvPr>
+          <p:cNvSpPr txBox="1">
+            <a:spLocks noGrp="1"/>
+          </p:cNvSpPr>
+          <p:nvPr>
+            <p:ph type="body" idx="1"/>
+          </p:nvPr>
+        </p:nvSpPr>
+        <p:spPr>
+          <a:xfrm>
+            <a:off x="685800" y="4343400"/>
+            <a:ext cx="5486400" cy="4114800"/>
+          </a:xfrm>
+          <a:prstGeom prst="rect">
+            <a:avLst/>
+          </a:prstGeom>
+        </p:spPr>
+        <p:txBody>
+          <a:bodyPr spcFirstLastPara="1" wrap="square" lIns="91425" tIns="91425" rIns="91425" bIns="91425" anchor="t" anchorCtr="0">
+            <a:noAutofit/>
+          </a:bodyPr>
+          <a:lstStyle/>
+          <a:p>
+            <a:pPr marL="0" lvl="0" indent="0" algn="l" rtl="0">
+              <a:spcBef>
+                <a:spcPts val="0"/>
+              </a:spcBef>
+              <a:spcAft>
+                <a:spcPts val="0"/>
+              </a:spcAft>
+              <a:buNone/>
+            </a:pPr>
+            <a:endParaRPr/>
+          </a:p>
+        </p:txBody>
+      </p:sp>
+      <p:sp>
+        <p:nvSpPr>
+          <p:cNvPr id="158" name="Google Shape;158;p6:notes">
+            <a:extLst>
+              <a:ext uri="{FF2B5EF4-FFF2-40B4-BE49-F238E27FC236}">
+                <a16:creationId xmlns:a16="http://schemas.microsoft.com/office/drawing/2014/main" id="{BAC9A1E5-99A1-D7DC-7BEF-470FF689A8B2}"/>
+              </a:ext>
+            </a:extLst>
+          </p:cNvPr>
+          <p:cNvSpPr>
+            <a:spLocks noGrp="1" noRot="1" noChangeAspect="1"/>
+          </p:cNvSpPr>
+          <p:nvPr>
+            <p:ph type="sldImg" idx="2"/>
+          </p:nvPr>
+        </p:nvSpPr>
+        <p:spPr>
+          <a:xfrm>
+            <a:off x="381000" y="685800"/>
+            <a:ext cx="6096000" cy="3429000"/>
+          </a:xfrm>
+          <a:custGeom>
+            <a:avLst/>
+            <a:gdLst/>
+            <a:ahLst/>
+            <a:cxnLst/>
+            <a:rect l="l" t="t" r="r" b="b"/>
+            <a:pathLst>
+              <a:path w="120000" h="120000" extrusionOk="0">
+                <a:moveTo>
+                  <a:pt x="0" y="0"/>
+                </a:moveTo>
+                <a:lnTo>
+                  <a:pt x="120000" y="0"/>
+                </a:lnTo>
+                <a:lnTo>
+                  <a:pt x="120000" y="120000"/>
+                </a:lnTo>
+                <a:lnTo>
+                  <a:pt x="0" y="120000"/>
+                </a:lnTo>
+                <a:close/>
+              </a:path>
+            </a:pathLst>
+          </a:custGeom>
+        </p:spPr>
+      </p:sp>
+    </p:spTree>
+    <p:extLst>
+      <p:ext uri="{BB962C8B-B14F-4D97-AF65-F5344CB8AC3E}">
+        <p14:creationId xmlns:p14="http://schemas.microsoft.com/office/powerpoint/2010/main" val="2169514839"/>
+      </p:ext>
+    </p:extLst>
+  </p:cSld>
+  <p:clrMapOvr>
+    <a:masterClrMapping/>
+  </p:clrMapOvr>
+</p:notes>
+</file>
+
+<file path=ppt/notesSlides/notesSlide8.xml><?xml version="1.0" encoding="utf-8"?>
+<p:notes xmlns:a="http://schemas.openxmlformats.org/drawingml/2006/main" xmlns:r="http://schemas.openxmlformats.org/officeDocument/2006/relationships" xmlns:p="http://schemas.openxmlformats.org/presentationml/2006/main" showMasterSp="0" showMasterPhAnim="0">
+  <p:cSld>
+    <p:spTree>
+      <p:nvGrpSpPr>
         <p:cNvPr id="1" name="Shape 156"/>
         <p:cNvGrpSpPr/>
         <p:nvPr/>
@@ -2181,7 +2413,7 @@
 </p:notes>
 </file>
 
-<file path=ppt/notesSlides/notesSlide8.xml><?xml version="1.0" encoding="utf-8"?>
+<file path=ppt/notesSlides/notesSlide9.xml><?xml version="1.0" encoding="utf-8"?>
 <p:notes xmlns:a="http://schemas.openxmlformats.org/drawingml/2006/main" xmlns:r="http://schemas.openxmlformats.org/officeDocument/2006/relationships" xmlns:p="http://schemas.openxmlformats.org/presentationml/2006/main" showMasterSp="0" showMasterPhAnim="0">
   <p:cSld>
     <p:spTree>
@@ -2239,110 +2471,6 @@
       <p:sp>
         <p:nvSpPr>
           <p:cNvPr id="167" name="Google Shape;167;p7:notes"/>
-          <p:cNvSpPr>
-            <a:spLocks noGrp="1" noRot="1" noChangeAspect="1"/>
-          </p:cNvSpPr>
-          <p:nvPr>
-            <p:ph type="sldImg" idx="2"/>
-          </p:nvPr>
-        </p:nvSpPr>
-        <p:spPr>
-          <a:xfrm>
-            <a:off x="381000" y="685800"/>
-            <a:ext cx="6096000" cy="3429000"/>
-          </a:xfrm>
-          <a:custGeom>
-            <a:avLst/>
-            <a:gdLst/>
-            <a:ahLst/>
-            <a:cxnLst/>
-            <a:rect l="l" t="t" r="r" b="b"/>
-            <a:pathLst>
-              <a:path w="120000" h="120000" extrusionOk="0">
-                <a:moveTo>
-                  <a:pt x="0" y="0"/>
-                </a:moveTo>
-                <a:lnTo>
-                  <a:pt x="120000" y="0"/>
-                </a:lnTo>
-                <a:lnTo>
-                  <a:pt x="120000" y="120000"/>
-                </a:lnTo>
-                <a:lnTo>
-                  <a:pt x="0" y="120000"/>
-                </a:lnTo>
-                <a:close/>
-              </a:path>
-            </a:pathLst>
-          </a:custGeom>
-        </p:spPr>
-      </p:sp>
-    </p:spTree>
-  </p:cSld>
-  <p:clrMapOvr>
-    <a:masterClrMapping/>
-  </p:clrMapOvr>
-</p:notes>
-</file>
-
-<file path=ppt/notesSlides/notesSlide9.xml><?xml version="1.0" encoding="utf-8"?>
-<p:notes xmlns:a="http://schemas.openxmlformats.org/drawingml/2006/main" xmlns:r="http://schemas.openxmlformats.org/officeDocument/2006/relationships" xmlns:p="http://schemas.openxmlformats.org/presentationml/2006/main" showMasterSp="0" showMasterPhAnim="0">
-  <p:cSld>
-    <p:spTree>
-      <p:nvGrpSpPr>
-        <p:cNvPr id="1" name="Shape 173"/>
-        <p:cNvGrpSpPr/>
-        <p:nvPr/>
-      </p:nvGrpSpPr>
-      <p:grpSpPr>
-        <a:xfrm>
-          <a:off x="0" y="0"/>
-          <a:ext cx="0" cy="0"/>
-          <a:chOff x="0" y="0"/>
-          <a:chExt cx="0" cy="0"/>
-        </a:xfrm>
-      </p:grpSpPr>
-      <p:sp>
-        <p:nvSpPr>
-          <p:cNvPr id="174" name="Google Shape;174;p8:notes"/>
-          <p:cNvSpPr txBox="1">
-            <a:spLocks noGrp="1"/>
-          </p:cNvSpPr>
-          <p:nvPr>
-            <p:ph type="body" idx="1"/>
-          </p:nvPr>
-        </p:nvSpPr>
-        <p:spPr>
-          <a:xfrm>
-            <a:off x="685800" y="4343400"/>
-            <a:ext cx="5486400" cy="4114800"/>
-          </a:xfrm>
-          <a:prstGeom prst="rect">
-            <a:avLst/>
-          </a:prstGeom>
-        </p:spPr>
-        <p:txBody>
-          <a:bodyPr spcFirstLastPara="1" wrap="square" lIns="91425" tIns="91425" rIns="91425" bIns="91425" anchor="t" anchorCtr="0">
-            <a:noAutofit/>
-          </a:bodyPr>
-          <a:lstStyle/>
-          <a:p>
-            <a:pPr marL="0" lvl="0" indent="0" algn="l" rtl="0">
-              <a:spcBef>
-                <a:spcPts val="0"/>
-              </a:spcBef>
-              <a:spcAft>
-                <a:spcPts val="0"/>
-              </a:spcAft>
-              <a:buNone/>
-            </a:pPr>
-            <a:endParaRPr/>
-          </a:p>
-        </p:txBody>
-      </p:sp>
-      <p:sp>
-        <p:nvSpPr>
-          <p:cNvPr id="175" name="Google Shape;175;p8:notes"/>
           <p:cNvSpPr>
             <a:spLocks noGrp="1" noRot="1" noChangeAspect="1"/>
           </p:cNvSpPr>
@@ -11943,6 +12071,472 @@
     </p:bg>
     <p:spTree>
       <p:nvGrpSpPr>
+        <p:cNvPr id="1" name="Shape 176"/>
+        <p:cNvGrpSpPr/>
+        <p:nvPr/>
+      </p:nvGrpSpPr>
+      <p:grpSpPr>
+        <a:xfrm>
+          <a:off x="0" y="0"/>
+          <a:ext cx="0" cy="0"/>
+          <a:chOff x="0" y="0"/>
+          <a:chExt cx="0" cy="0"/>
+        </a:xfrm>
+      </p:grpSpPr>
+      <p:sp>
+        <p:nvSpPr>
+          <p:cNvPr id="181" name="Google Shape;181;p20"/>
+          <p:cNvSpPr txBox="1"/>
+          <p:nvPr/>
+        </p:nvSpPr>
+        <p:spPr>
+          <a:xfrm>
+            <a:off x="571500" y="4814887"/>
+            <a:ext cx="3492549" cy="857250"/>
+          </a:xfrm>
+          <a:prstGeom prst="rect">
+            <a:avLst/>
+          </a:prstGeom>
+          <a:noFill/>
+          <a:ln>
+            <a:noFill/>
+          </a:ln>
+        </p:spPr>
+        <p:txBody>
+          <a:bodyPr spcFirstLastPara="1" wrap="square" lIns="0" tIns="0" rIns="0" bIns="0" anchor="t" anchorCtr="0">
+            <a:spAutoFit/>
+          </a:bodyPr>
+          <a:lstStyle/>
+          <a:p>
+            <a:pPr marL="0" marR="0" lvl="0" indent="0" algn="ctr" rtl="0">
+              <a:lnSpc>
+                <a:spcPct val="125000"/>
+              </a:lnSpc>
+              <a:spcBef>
+                <a:spcPts val="0"/>
+              </a:spcBef>
+              <a:spcAft>
+                <a:spcPts val="0"/>
+              </a:spcAft>
+              <a:buNone/>
+            </a:pPr>
+            <a:r>
+              <a:rPr lang="en-US" sz="1500" b="1" i="0" u="none" strike="noStrike" cap="none">
+                <a:solidFill>
+                  <a:srgbClr val="CBD5E1"/>
+                </a:solidFill>
+                <a:latin typeface="Plus Jakarta Sans"/>
+                <a:ea typeface="Plus Jakarta Sans"/>
+                <a:cs typeface="Plus Jakarta Sans"/>
+                <a:sym typeface="Plus Jakarta Sans"/>
+              </a:rPr>
+              <a:t>Step 1: Bozza</a:t>
+            </a:r>
+            <a:br>
+              <a:rPr lang="en-US" sz="1800" b="0" i="0" u="none" strike="noStrike" cap="none">
+                <a:solidFill>
+                  <a:schemeClr val="dk1"/>
+                </a:solidFill>
+                <a:latin typeface="Calibri"/>
+                <a:ea typeface="Calibri"/>
+                <a:cs typeface="Calibri"/>
+                <a:sym typeface="Calibri"/>
+              </a:rPr>
+            </a:br>
+            <a:r>
+              <a:rPr lang="en-US" sz="1500" b="0" i="0" u="none" strike="noStrike" cap="none">
+                <a:solidFill>
+                  <a:srgbClr val="CBD5E1"/>
+                </a:solidFill>
+                <a:latin typeface="Plus Jakarta Sans"/>
+                <a:ea typeface="Plus Jakarta Sans"/>
+                <a:cs typeface="Plus Jakarta Sans"/>
+                <a:sym typeface="Plus Jakarta Sans"/>
+              </a:rPr>
+              <a:t> Schizzi manuali per definire i flussi utente.</a:t>
+            </a:r>
+            <a:endParaRPr/>
+          </a:p>
+        </p:txBody>
+      </p:sp>
+      <p:sp>
+        <p:nvSpPr>
+          <p:cNvPr id="182" name="Google Shape;182;p20"/>
+          <p:cNvSpPr txBox="1"/>
+          <p:nvPr/>
+        </p:nvSpPr>
+        <p:spPr>
+          <a:xfrm>
+            <a:off x="4349799" y="4814887"/>
+            <a:ext cx="3492549" cy="571500"/>
+          </a:xfrm>
+          <a:prstGeom prst="rect">
+            <a:avLst/>
+          </a:prstGeom>
+          <a:noFill/>
+          <a:ln>
+            <a:noFill/>
+          </a:ln>
+        </p:spPr>
+        <p:txBody>
+          <a:bodyPr spcFirstLastPara="1" wrap="square" lIns="0" tIns="0" rIns="0" bIns="0" anchor="t" anchorCtr="0">
+            <a:spAutoFit/>
+          </a:bodyPr>
+          <a:lstStyle/>
+          <a:p>
+            <a:pPr marL="0" marR="0" lvl="0" indent="0" algn="ctr" rtl="0">
+              <a:lnSpc>
+                <a:spcPct val="125000"/>
+              </a:lnSpc>
+              <a:spcBef>
+                <a:spcPts val="0"/>
+              </a:spcBef>
+              <a:spcAft>
+                <a:spcPts val="0"/>
+              </a:spcAft>
+              <a:buNone/>
+            </a:pPr>
+            <a:r>
+              <a:rPr lang="en-US" sz="1500" b="1" i="0" u="none" strike="noStrike" cap="none">
+                <a:solidFill>
+                  <a:srgbClr val="CBD5E1"/>
+                </a:solidFill>
+                <a:latin typeface="Plus Jakarta Sans"/>
+                <a:ea typeface="Plus Jakarta Sans"/>
+                <a:cs typeface="Plus Jakarta Sans"/>
+                <a:sym typeface="Plus Jakarta Sans"/>
+              </a:rPr>
+              <a:t>Step 2: Figma</a:t>
+            </a:r>
+            <a:br>
+              <a:rPr lang="en-US" sz="1800" b="0" i="0" u="none" strike="noStrike" cap="none">
+                <a:solidFill>
+                  <a:schemeClr val="dk1"/>
+                </a:solidFill>
+                <a:latin typeface="Calibri"/>
+                <a:ea typeface="Calibri"/>
+                <a:cs typeface="Calibri"/>
+                <a:sym typeface="Calibri"/>
+              </a:rPr>
+            </a:br>
+            <a:r>
+              <a:rPr lang="en-US" sz="1500" b="0" i="0" u="none" strike="noStrike" cap="none">
+                <a:solidFill>
+                  <a:srgbClr val="CBD5E1"/>
+                </a:solidFill>
+                <a:latin typeface="Plus Jakarta Sans"/>
+                <a:ea typeface="Plus Jakarta Sans"/>
+                <a:cs typeface="Plus Jakarta Sans"/>
+                <a:sym typeface="Plus Jakarta Sans"/>
+              </a:rPr>
+              <a:t> Progettazione UI/UX ad alta fedeltà.</a:t>
+            </a:r>
+            <a:endParaRPr/>
+          </a:p>
+        </p:txBody>
+      </p:sp>
+      <p:sp>
+        <p:nvSpPr>
+          <p:cNvPr id="183" name="Google Shape;183;p20"/>
+          <p:cNvSpPr txBox="1"/>
+          <p:nvPr/>
+        </p:nvSpPr>
+        <p:spPr>
+          <a:xfrm>
+            <a:off x="8128099" y="4814887"/>
+            <a:ext cx="3492549" cy="571500"/>
+          </a:xfrm>
+          <a:prstGeom prst="rect">
+            <a:avLst/>
+          </a:prstGeom>
+          <a:noFill/>
+          <a:ln>
+            <a:noFill/>
+          </a:ln>
+        </p:spPr>
+        <p:txBody>
+          <a:bodyPr spcFirstLastPara="1" wrap="square" lIns="0" tIns="0" rIns="0" bIns="0" anchor="t" anchorCtr="0">
+            <a:spAutoFit/>
+          </a:bodyPr>
+          <a:lstStyle/>
+          <a:p>
+            <a:pPr marL="0" marR="0" lvl="0" indent="0" algn="ctr" rtl="0">
+              <a:lnSpc>
+                <a:spcPct val="125000"/>
+              </a:lnSpc>
+              <a:spcBef>
+                <a:spcPts val="0"/>
+              </a:spcBef>
+              <a:spcAft>
+                <a:spcPts val="0"/>
+              </a:spcAft>
+              <a:buNone/>
+            </a:pPr>
+            <a:r>
+              <a:rPr lang="en-US" sz="1500" b="1" i="0" u="none" strike="noStrike" cap="none">
+                <a:solidFill>
+                  <a:srgbClr val="CBD5E1"/>
+                </a:solidFill>
+                <a:latin typeface="Plus Jakarta Sans"/>
+                <a:ea typeface="Plus Jakarta Sans"/>
+                <a:cs typeface="Plus Jakarta Sans"/>
+                <a:sym typeface="Plus Jakarta Sans"/>
+              </a:rPr>
+              <a:t>Step 3: Prototipo</a:t>
+            </a:r>
+            <a:br>
+              <a:rPr lang="en-US" sz="1800" b="0" i="0" u="none" strike="noStrike" cap="none">
+                <a:solidFill>
+                  <a:schemeClr val="dk1"/>
+                </a:solidFill>
+                <a:latin typeface="Calibri"/>
+                <a:ea typeface="Calibri"/>
+                <a:cs typeface="Calibri"/>
+                <a:sym typeface="Calibri"/>
+              </a:rPr>
+            </a:br>
+            <a:r>
+              <a:rPr lang="en-US" sz="1500" b="0" i="0" u="none" strike="noStrike" cap="none">
+                <a:solidFill>
+                  <a:srgbClr val="CBD5E1"/>
+                </a:solidFill>
+                <a:latin typeface="Plus Jakarta Sans"/>
+                <a:ea typeface="Plus Jakarta Sans"/>
+                <a:cs typeface="Plus Jakarta Sans"/>
+                <a:sym typeface="Plus Jakarta Sans"/>
+              </a:rPr>
+              <a:t> Validazione della struttura dell'orario.</a:t>
+            </a:r>
+            <a:endParaRPr/>
+          </a:p>
+        </p:txBody>
+      </p:sp>
+      <p:sp>
+        <p:nvSpPr>
+          <p:cNvPr id="187" name="Google Shape;187;p20"/>
+          <p:cNvSpPr txBox="1"/>
+          <p:nvPr/>
+        </p:nvSpPr>
+        <p:spPr>
+          <a:xfrm>
+            <a:off x="809625" y="571500"/>
+            <a:ext cx="11351418" cy="581025"/>
+          </a:xfrm>
+          <a:prstGeom prst="rect">
+            <a:avLst/>
+          </a:prstGeom>
+          <a:noFill/>
+          <a:ln>
+            <a:noFill/>
+          </a:ln>
+        </p:spPr>
+        <p:txBody>
+          <a:bodyPr spcFirstLastPara="1" wrap="square" lIns="0" tIns="0" rIns="0" bIns="0" anchor="t" anchorCtr="0">
+            <a:spAutoFit/>
+          </a:bodyPr>
+          <a:lstStyle/>
+          <a:p>
+            <a:pPr marL="0" marR="0" lvl="0" indent="0" algn="l" rtl="0">
+              <a:spcBef>
+                <a:spcPts val="0"/>
+              </a:spcBef>
+              <a:spcAft>
+                <a:spcPts val="0"/>
+              </a:spcAft>
+              <a:buNone/>
+            </a:pPr>
+            <a:r>
+              <a:rPr lang="en-US" sz="3600" b="0" i="0" u="none" strike="noStrike" cap="none">
+                <a:solidFill>
+                  <a:srgbClr val="8B5CF6"/>
+                </a:solidFill>
+                <a:latin typeface="Plus Jakarta Sans ExtraBold"/>
+                <a:ea typeface="Plus Jakarta Sans ExtraBold"/>
+                <a:cs typeface="Plus Jakarta Sans ExtraBold"/>
+                <a:sym typeface="Plus Jakarta Sans ExtraBold"/>
+              </a:rPr>
+              <a:t>Iterazione del Design</a:t>
+            </a:r>
+            <a:endParaRPr/>
+          </a:p>
+        </p:txBody>
+      </p:sp>
+      <p:sp>
+        <p:nvSpPr>
+          <p:cNvPr id="188" name="Google Shape;188;p20"/>
+          <p:cNvSpPr/>
+          <p:nvPr/>
+        </p:nvSpPr>
+        <p:spPr>
+          <a:xfrm>
+            <a:off x="571500" y="571500"/>
+            <a:ext cx="95250" cy="581025"/>
+          </a:xfrm>
+          <a:prstGeom prst="rect">
+            <a:avLst/>
+          </a:prstGeom>
+          <a:solidFill>
+            <a:srgbClr val="EC4899"/>
+          </a:solidFill>
+          <a:ln>
+            <a:noFill/>
+          </a:ln>
+        </p:spPr>
+        <p:txBody>
+          <a:bodyPr spcFirstLastPara="1" wrap="square" lIns="91425" tIns="45700" rIns="91425" bIns="45700" anchor="ctr" anchorCtr="0">
+            <a:noAutofit/>
+          </a:bodyPr>
+          <a:lstStyle/>
+          <a:p>
+            <a:pPr marL="0" marR="0" lvl="0" indent="0" algn="ctr" rtl="0">
+              <a:spcBef>
+                <a:spcPts val="0"/>
+              </a:spcBef>
+              <a:spcAft>
+                <a:spcPts val="0"/>
+              </a:spcAft>
+              <a:buNone/>
+            </a:pPr>
+            <a:endParaRPr sz="1800" b="0" i="0" u="none" strike="noStrike" cap="none">
+              <a:solidFill>
+                <a:schemeClr val="dk1"/>
+              </a:solidFill>
+              <a:latin typeface="Calibri"/>
+              <a:ea typeface="Calibri"/>
+              <a:cs typeface="Calibri"/>
+              <a:sym typeface="Calibri"/>
+            </a:endParaRPr>
+          </a:p>
+        </p:txBody>
+      </p:sp>
+      <p:pic>
+        <p:nvPicPr>
+          <p:cNvPr id="1032" name="Picture 8" descr="Pengertian Figma, Membahas Fitur dan Harga - TokoWeb.co">
+            <a:extLst>
+              <a:ext uri="{FF2B5EF4-FFF2-40B4-BE49-F238E27FC236}">
+                <a16:creationId xmlns:a16="http://schemas.microsoft.com/office/drawing/2014/main" id="{2B6EDE24-DFF5-EC88-DE95-C94816A2CE3C}"/>
+              </a:ext>
+            </a:extLst>
+          </p:cNvPr>
+          <p:cNvPicPr>
+            <a:picLocks noChangeAspect="1" noChangeArrowheads="1"/>
+          </p:cNvPicPr>
+          <p:nvPr/>
+        </p:nvPicPr>
+        <p:blipFill rotWithShape="1">
+          <a:blip r:embed="rId3">
+            <a:extLst>
+              <a:ext uri="{28A0092B-C50C-407E-A947-70E740481C1C}">
+                <a14:useLocalDpi xmlns:a14="http://schemas.microsoft.com/office/drawing/2010/main" val="0"/>
+              </a:ext>
+            </a:extLst>
+          </a:blip>
+          <a:srcRect l="10505" r="14701"/>
+          <a:stretch>
+            <a:fillRect/>
+          </a:stretch>
+        </p:blipFill>
+        <p:spPr bwMode="auto">
+          <a:xfrm>
+            <a:off x="4294520" y="1941565"/>
+            <a:ext cx="3547828" cy="2667000"/>
+          </a:xfrm>
+          <a:prstGeom prst="rect">
+            <a:avLst/>
+          </a:prstGeom>
+          <a:noFill/>
+          <a:extLst>
+            <a:ext uri="{909E8E84-426E-40DD-AFC4-6F175D3DCCD1}">
+              <a14:hiddenFill xmlns:a14="http://schemas.microsoft.com/office/drawing/2010/main">
+                <a:solidFill>
+                  <a:srgbClr val="FFFFFF"/>
+                </a:solidFill>
+              </a14:hiddenFill>
+            </a:ext>
+          </a:extLst>
+        </p:spPr>
+      </p:pic>
+      <p:pic>
+        <p:nvPicPr>
+          <p:cNvPr id="7" name="Picture 6">
+            <a:extLst>
+              <a:ext uri="{FF2B5EF4-FFF2-40B4-BE49-F238E27FC236}">
+                <a16:creationId xmlns:a16="http://schemas.microsoft.com/office/drawing/2014/main" id="{AE38E2CE-3562-E780-0CFC-07A276BEF6F4}"/>
+              </a:ext>
+            </a:extLst>
+          </p:cNvPr>
+          <p:cNvPicPr>
+            <a:picLocks noChangeAspect="1"/>
+          </p:cNvPicPr>
+          <p:nvPr/>
+        </p:nvPicPr>
+        <p:blipFill>
+          <a:blip r:embed="rId4"/>
+          <a:stretch>
+            <a:fillRect/>
+          </a:stretch>
+        </p:blipFill>
+        <p:spPr>
+          <a:xfrm>
+            <a:off x="814064" y="1966912"/>
+            <a:ext cx="3007420" cy="2641653"/>
+          </a:xfrm>
+          <a:prstGeom prst="rect">
+            <a:avLst/>
+          </a:prstGeom>
+        </p:spPr>
+      </p:pic>
+      <p:pic>
+        <p:nvPicPr>
+          <p:cNvPr id="9" name="Picture 8">
+            <a:extLst>
+              <a:ext uri="{FF2B5EF4-FFF2-40B4-BE49-F238E27FC236}">
+                <a16:creationId xmlns:a16="http://schemas.microsoft.com/office/drawing/2014/main" id="{9487BD25-22A9-2AA6-528A-083825CB6905}"/>
+              </a:ext>
+            </a:extLst>
+          </p:cNvPr>
+          <p:cNvPicPr>
+            <a:picLocks noChangeAspect="1"/>
+          </p:cNvPicPr>
+          <p:nvPr/>
+        </p:nvPicPr>
+        <p:blipFill>
+          <a:blip r:embed="rId5"/>
+          <a:stretch>
+            <a:fillRect/>
+          </a:stretch>
+        </p:blipFill>
+        <p:spPr>
+          <a:xfrm>
+            <a:off x="8128099" y="1982345"/>
+            <a:ext cx="3249837" cy="2626220"/>
+          </a:xfrm>
+          <a:prstGeom prst="rect">
+            <a:avLst/>
+          </a:prstGeom>
+        </p:spPr>
+      </p:pic>
+    </p:spTree>
+  </p:cSld>
+  <p:clrMapOvr>
+    <a:masterClrMapping/>
+  </p:clrMapOvr>
+</p:sld>
+</file>
+
+<file path=ppt/slides/slide11.xml><?xml version="1.0" encoding="utf-8"?>
+<p:sld xmlns:a="http://schemas.openxmlformats.org/drawingml/2006/main" xmlns:r="http://schemas.openxmlformats.org/officeDocument/2006/relationships" xmlns:p="http://schemas.openxmlformats.org/presentationml/2006/main">
+  <p:cSld>
+    <p:bg>
+      <p:bgPr>
+        <a:solidFill>
+          <a:srgbClr val="0F172A"/>
+        </a:solidFill>
+        <a:effectLst/>
+      </p:bgPr>
+    </p:bg>
+    <p:spTree>
+      <p:nvGrpSpPr>
         <p:cNvPr id="1" name="Shape 192"/>
         <p:cNvGrpSpPr/>
         <p:nvPr/>
@@ -12114,7 +12708,7 @@
 </p:sld>
 </file>
 
-<file path=ppt/slides/slide11.xml><?xml version="1.0" encoding="utf-8"?>
+<file path=ppt/slides/slide12.xml><?xml version="1.0" encoding="utf-8"?>
 <p:sld xmlns:a="http://schemas.openxmlformats.org/drawingml/2006/main" xmlns:r="http://schemas.openxmlformats.org/officeDocument/2006/relationships" xmlns:p="http://schemas.openxmlformats.org/presentationml/2006/main">
   <p:cSld>
     <p:bg>
@@ -12740,7 +13334,7 @@
 </p:sld>
 </file>
 
-<file path=ppt/slides/slide12.xml><?xml version="1.0" encoding="utf-8"?>
+<file path=ppt/slides/slide13.xml><?xml version="1.0" encoding="utf-8"?>
 <p:sld xmlns:a="http://schemas.openxmlformats.org/drawingml/2006/main" xmlns:r="http://schemas.openxmlformats.org/officeDocument/2006/relationships" xmlns:p="http://schemas.openxmlformats.org/presentationml/2006/main">
   <p:cSld>
     <p:bg>
@@ -13014,7 +13608,7 @@
 </p:sld>
 </file>
 
-<file path=ppt/slides/slide13.xml><?xml version="1.0" encoding="utf-8"?>
+<file path=ppt/slides/slide14.xml><?xml version="1.0" encoding="utf-8"?>
 <p:sld xmlns:a="http://schemas.openxmlformats.org/drawingml/2006/main" xmlns:r="http://schemas.openxmlformats.org/officeDocument/2006/relationships" xmlns:p="http://schemas.openxmlformats.org/presentationml/2006/main">
   <p:cSld>
     <p:bg>
@@ -13832,7 +14426,7 @@
 </p:sld>
 </file>
 
-<file path=ppt/slides/slide14.xml><?xml version="1.0" encoding="utf-8"?>
+<file path=ppt/slides/slide15.xml><?xml version="1.0" encoding="utf-8"?>
 <p:sld xmlns:a="http://schemas.openxmlformats.org/drawingml/2006/main" xmlns:r="http://schemas.openxmlformats.org/officeDocument/2006/relationships" xmlns:p="http://schemas.openxmlformats.org/presentationml/2006/main">
   <p:cSld>
     <p:bg>
@@ -14057,7 +14651,7 @@
 </p:sld>
 </file>
 
-<file path=ppt/slides/slide15.xml><?xml version="1.0" encoding="utf-8"?>
+<file path=ppt/slides/slide16.xml><?xml version="1.0" encoding="utf-8"?>
 <p:sld xmlns:a="http://schemas.openxmlformats.org/drawingml/2006/main" xmlns:r="http://schemas.openxmlformats.org/officeDocument/2006/relationships" xmlns:p="http://schemas.openxmlformats.org/presentationml/2006/main">
   <p:cSld>
     <p:bg>
@@ -15737,7 +16331,7 @@
           <a:p>
             <a:pPr algn="ctr"/>
             <a:r>
-              <a:rPr lang="it-CH" sz="1400"/>
+              <a:rPr lang="it-CH" sz="1400" dirty="0"/>
               <a:t>Concezione</a:t>
             </a:r>
           </a:p>
@@ -16252,522 +16846,6 @@
   <p:clrMapOvr>
     <a:masterClrMapping/>
   </p:clrMapOvr>
-  <p:timing>
-    <p:tnLst>
-      <p:par>
-        <p:cTn id="1" dur="indefinite" restart="never" nodeType="tmRoot">
-          <p:childTnLst>
-            <p:seq concurrent="1" nextAc="seek">
-              <p:cTn id="2" dur="indefinite" nodeType="mainSeq">
-                <p:childTnLst>
-                  <p:par>
-                    <p:cTn id="3" fill="hold">
-                      <p:stCondLst>
-                        <p:cond delay="indefinite"/>
-                      </p:stCondLst>
-                      <p:childTnLst>
-                        <p:par>
-                          <p:cTn id="4" fill="hold">
-                            <p:stCondLst>
-                              <p:cond delay="0"/>
-                            </p:stCondLst>
-                            <p:childTnLst>
-                              <p:par>
-                                <p:cTn id="5" presetID="10" presetClass="entr" presetSubtype="0" fill="hold" grpId="0" nodeType="clickEffect">
-                                  <p:stCondLst>
-                                    <p:cond delay="0"/>
-                                  </p:stCondLst>
-                                  <p:childTnLst>
-                                    <p:set>
-                                      <p:cBhvr>
-                                        <p:cTn id="6" dur="1" fill="hold">
-                                          <p:stCondLst>
-                                            <p:cond delay="0"/>
-                                          </p:stCondLst>
-                                        </p:cTn>
-                                        <p:tgtEl>
-                                          <p:spTgt spid="2"/>
-                                        </p:tgtEl>
-                                        <p:attrNameLst>
-                                          <p:attrName>style.visibility</p:attrName>
-                                        </p:attrNameLst>
-                                      </p:cBhvr>
-                                      <p:to>
-                                        <p:strVal val="visible"/>
-                                      </p:to>
-                                    </p:set>
-                                    <p:animEffect transition="in" filter="fade">
-                                      <p:cBhvr>
-                                        <p:cTn id="7" dur="500"/>
-                                        <p:tgtEl>
-                                          <p:spTgt spid="2"/>
-                                        </p:tgtEl>
-                                      </p:cBhvr>
-                                    </p:animEffect>
-                                  </p:childTnLst>
-                                </p:cTn>
-                              </p:par>
-                              <p:par>
-                                <p:cTn id="8" presetID="10" presetClass="entr" presetSubtype="0" fill="hold" grpId="0" nodeType="withEffect">
-                                  <p:stCondLst>
-                                    <p:cond delay="0"/>
-                                  </p:stCondLst>
-                                  <p:childTnLst>
-                                    <p:set>
-                                      <p:cBhvr>
-                                        <p:cTn id="9" dur="1" fill="hold">
-                                          <p:stCondLst>
-                                            <p:cond delay="0"/>
-                                          </p:stCondLst>
-                                        </p:cTn>
-                                        <p:tgtEl>
-                                          <p:spTgt spid="3"/>
-                                        </p:tgtEl>
-                                        <p:attrNameLst>
-                                          <p:attrName>style.visibility</p:attrName>
-                                        </p:attrNameLst>
-                                      </p:cBhvr>
-                                      <p:to>
-                                        <p:strVal val="visible"/>
-                                      </p:to>
-                                    </p:set>
-                                    <p:animEffect transition="in" filter="fade">
-                                      <p:cBhvr>
-                                        <p:cTn id="10" dur="500"/>
-                                        <p:tgtEl>
-                                          <p:spTgt spid="3"/>
-                                        </p:tgtEl>
-                                      </p:cBhvr>
-                                    </p:animEffect>
-                                  </p:childTnLst>
-                                </p:cTn>
-                              </p:par>
-                              <p:par>
-                                <p:cTn id="11" presetID="10" presetClass="entr" presetSubtype="0" fill="hold" grpId="0" nodeType="withEffect">
-                                  <p:stCondLst>
-                                    <p:cond delay="0"/>
-                                  </p:stCondLst>
-                                  <p:childTnLst>
-                                    <p:set>
-                                      <p:cBhvr>
-                                        <p:cTn id="12" dur="1" fill="hold">
-                                          <p:stCondLst>
-                                            <p:cond delay="0"/>
-                                          </p:stCondLst>
-                                        </p:cTn>
-                                        <p:tgtEl>
-                                          <p:spTgt spid="4"/>
-                                        </p:tgtEl>
-                                        <p:attrNameLst>
-                                          <p:attrName>style.visibility</p:attrName>
-                                        </p:attrNameLst>
-                                      </p:cBhvr>
-                                      <p:to>
-                                        <p:strVal val="visible"/>
-                                      </p:to>
-                                    </p:set>
-                                    <p:animEffect transition="in" filter="fade">
-                                      <p:cBhvr>
-                                        <p:cTn id="13" dur="500"/>
-                                        <p:tgtEl>
-                                          <p:spTgt spid="4"/>
-                                        </p:tgtEl>
-                                      </p:cBhvr>
-                                    </p:animEffect>
-                                  </p:childTnLst>
-                                </p:cTn>
-                              </p:par>
-                              <p:par>
-                                <p:cTn id="14" presetID="10" presetClass="entr" presetSubtype="0" fill="hold" grpId="0" nodeType="withEffect">
-                                  <p:stCondLst>
-                                    <p:cond delay="0"/>
-                                  </p:stCondLst>
-                                  <p:childTnLst>
-                                    <p:set>
-                                      <p:cBhvr>
-                                        <p:cTn id="15" dur="1" fill="hold">
-                                          <p:stCondLst>
-                                            <p:cond delay="0"/>
-                                          </p:stCondLst>
-                                        </p:cTn>
-                                        <p:tgtEl>
-                                          <p:spTgt spid="5"/>
-                                        </p:tgtEl>
-                                        <p:attrNameLst>
-                                          <p:attrName>style.visibility</p:attrName>
-                                        </p:attrNameLst>
-                                      </p:cBhvr>
-                                      <p:to>
-                                        <p:strVal val="visible"/>
-                                      </p:to>
-                                    </p:set>
-                                    <p:animEffect transition="in" filter="fade">
-                                      <p:cBhvr>
-                                        <p:cTn id="16" dur="500"/>
-                                        <p:tgtEl>
-                                          <p:spTgt spid="5"/>
-                                        </p:tgtEl>
-                                      </p:cBhvr>
-                                    </p:animEffect>
-                                  </p:childTnLst>
-                                </p:cTn>
-                              </p:par>
-                              <p:par>
-                                <p:cTn id="17" presetID="10" presetClass="entr" presetSubtype="0" fill="hold" grpId="0" nodeType="withEffect">
-                                  <p:stCondLst>
-                                    <p:cond delay="0"/>
-                                  </p:stCondLst>
-                                  <p:childTnLst>
-                                    <p:set>
-                                      <p:cBhvr>
-                                        <p:cTn id="18" dur="1" fill="hold">
-                                          <p:stCondLst>
-                                            <p:cond delay="0"/>
-                                          </p:stCondLst>
-                                        </p:cTn>
-                                        <p:tgtEl>
-                                          <p:spTgt spid="6"/>
-                                        </p:tgtEl>
-                                        <p:attrNameLst>
-                                          <p:attrName>style.visibility</p:attrName>
-                                        </p:attrNameLst>
-                                      </p:cBhvr>
-                                      <p:to>
-                                        <p:strVal val="visible"/>
-                                      </p:to>
-                                    </p:set>
-                                    <p:animEffect transition="in" filter="fade">
-                                      <p:cBhvr>
-                                        <p:cTn id="19" dur="500"/>
-                                        <p:tgtEl>
-                                          <p:spTgt spid="6"/>
-                                        </p:tgtEl>
-                                      </p:cBhvr>
-                                    </p:animEffect>
-                                  </p:childTnLst>
-                                </p:cTn>
-                              </p:par>
-                              <p:par>
-                                <p:cTn id="20" presetID="10" presetClass="entr" presetSubtype="0" fill="hold" nodeType="withEffect">
-                                  <p:stCondLst>
-                                    <p:cond delay="0"/>
-                                  </p:stCondLst>
-                                  <p:childTnLst>
-                                    <p:set>
-                                      <p:cBhvr>
-                                        <p:cTn id="21" dur="1" fill="hold">
-                                          <p:stCondLst>
-                                            <p:cond delay="0"/>
-                                          </p:stCondLst>
-                                        </p:cTn>
-                                        <p:tgtEl>
-                                          <p:spTgt spid="7"/>
-                                        </p:tgtEl>
-                                        <p:attrNameLst>
-                                          <p:attrName>style.visibility</p:attrName>
-                                        </p:attrNameLst>
-                                      </p:cBhvr>
-                                      <p:to>
-                                        <p:strVal val="visible"/>
-                                      </p:to>
-                                    </p:set>
-                                    <p:animEffect transition="in" filter="fade">
-                                      <p:cBhvr>
-                                        <p:cTn id="22" dur="500"/>
-                                        <p:tgtEl>
-                                          <p:spTgt spid="7"/>
-                                        </p:tgtEl>
-                                      </p:cBhvr>
-                                    </p:animEffect>
-                                  </p:childTnLst>
-                                </p:cTn>
-                              </p:par>
-                              <p:par>
-                                <p:cTn id="23" presetID="10" presetClass="entr" presetSubtype="0" fill="hold" nodeType="withEffect">
-                                  <p:stCondLst>
-                                    <p:cond delay="0"/>
-                                  </p:stCondLst>
-                                  <p:childTnLst>
-                                    <p:set>
-                                      <p:cBhvr>
-                                        <p:cTn id="24" dur="1" fill="hold">
-                                          <p:stCondLst>
-                                            <p:cond delay="0"/>
-                                          </p:stCondLst>
-                                        </p:cTn>
-                                        <p:tgtEl>
-                                          <p:spTgt spid="8"/>
-                                        </p:tgtEl>
-                                        <p:attrNameLst>
-                                          <p:attrName>style.visibility</p:attrName>
-                                        </p:attrNameLst>
-                                      </p:cBhvr>
-                                      <p:to>
-                                        <p:strVal val="visible"/>
-                                      </p:to>
-                                    </p:set>
-                                    <p:animEffect transition="in" filter="fade">
-                                      <p:cBhvr>
-                                        <p:cTn id="25" dur="500"/>
-                                        <p:tgtEl>
-                                          <p:spTgt spid="8"/>
-                                        </p:tgtEl>
-                                      </p:cBhvr>
-                                    </p:animEffect>
-                                  </p:childTnLst>
-                                </p:cTn>
-                              </p:par>
-                              <p:par>
-                                <p:cTn id="26" presetID="10" presetClass="entr" presetSubtype="0" fill="hold" grpId="0" nodeType="withEffect">
-                                  <p:stCondLst>
-                                    <p:cond delay="0"/>
-                                  </p:stCondLst>
-                                  <p:childTnLst>
-                                    <p:set>
-                                      <p:cBhvr>
-                                        <p:cTn id="27" dur="1" fill="hold">
-                                          <p:stCondLst>
-                                            <p:cond delay="0"/>
-                                          </p:stCondLst>
-                                        </p:cTn>
-                                        <p:tgtEl>
-                                          <p:spTgt spid="9"/>
-                                        </p:tgtEl>
-                                        <p:attrNameLst>
-                                          <p:attrName>style.visibility</p:attrName>
-                                        </p:attrNameLst>
-                                      </p:cBhvr>
-                                      <p:to>
-                                        <p:strVal val="visible"/>
-                                      </p:to>
-                                    </p:set>
-                                    <p:animEffect transition="in" filter="fade">
-                                      <p:cBhvr>
-                                        <p:cTn id="28" dur="500"/>
-                                        <p:tgtEl>
-                                          <p:spTgt spid="9"/>
-                                        </p:tgtEl>
-                                      </p:cBhvr>
-                                    </p:animEffect>
-                                  </p:childTnLst>
-                                </p:cTn>
-                              </p:par>
-                              <p:par>
-                                <p:cTn id="29" presetID="10" presetClass="entr" presetSubtype="0" fill="hold" grpId="0" nodeType="withEffect">
-                                  <p:stCondLst>
-                                    <p:cond delay="0"/>
-                                  </p:stCondLst>
-                                  <p:childTnLst>
-                                    <p:set>
-                                      <p:cBhvr>
-                                        <p:cTn id="30" dur="1" fill="hold">
-                                          <p:stCondLst>
-                                            <p:cond delay="0"/>
-                                          </p:stCondLst>
-                                        </p:cTn>
-                                        <p:tgtEl>
-                                          <p:spTgt spid="10"/>
-                                        </p:tgtEl>
-                                        <p:attrNameLst>
-                                          <p:attrName>style.visibility</p:attrName>
-                                        </p:attrNameLst>
-                                      </p:cBhvr>
-                                      <p:to>
-                                        <p:strVal val="visible"/>
-                                      </p:to>
-                                    </p:set>
-                                    <p:animEffect transition="in" filter="fade">
-                                      <p:cBhvr>
-                                        <p:cTn id="31" dur="500"/>
-                                        <p:tgtEl>
-                                          <p:spTgt spid="10"/>
-                                        </p:tgtEl>
-                                      </p:cBhvr>
-                                    </p:animEffect>
-                                  </p:childTnLst>
-                                </p:cTn>
-                              </p:par>
-                              <p:par>
-                                <p:cTn id="32" presetID="10" presetClass="entr" presetSubtype="0" fill="hold" grpId="0" nodeType="withEffect">
-                                  <p:stCondLst>
-                                    <p:cond delay="0"/>
-                                  </p:stCondLst>
-                                  <p:childTnLst>
-                                    <p:set>
-                                      <p:cBhvr>
-                                        <p:cTn id="33" dur="1" fill="hold">
-                                          <p:stCondLst>
-                                            <p:cond delay="0"/>
-                                          </p:stCondLst>
-                                        </p:cTn>
-                                        <p:tgtEl>
-                                          <p:spTgt spid="11"/>
-                                        </p:tgtEl>
-                                        <p:attrNameLst>
-                                          <p:attrName>style.visibility</p:attrName>
-                                        </p:attrNameLst>
-                                      </p:cBhvr>
-                                      <p:to>
-                                        <p:strVal val="visible"/>
-                                      </p:to>
-                                    </p:set>
-                                    <p:animEffect transition="in" filter="fade">
-                                      <p:cBhvr>
-                                        <p:cTn id="34" dur="500"/>
-                                        <p:tgtEl>
-                                          <p:spTgt spid="11"/>
-                                        </p:tgtEl>
-                                      </p:cBhvr>
-                                    </p:animEffect>
-                                  </p:childTnLst>
-                                </p:cTn>
-                              </p:par>
-                              <p:par>
-                                <p:cTn id="35" presetID="10" presetClass="entr" presetSubtype="0" fill="hold" grpId="0" nodeType="withEffect">
-                                  <p:stCondLst>
-                                    <p:cond delay="0"/>
-                                  </p:stCondLst>
-                                  <p:childTnLst>
-                                    <p:set>
-                                      <p:cBhvr>
-                                        <p:cTn id="36" dur="1" fill="hold">
-                                          <p:stCondLst>
-                                            <p:cond delay="0"/>
-                                          </p:stCondLst>
-                                        </p:cTn>
-                                        <p:tgtEl>
-                                          <p:spTgt spid="12"/>
-                                        </p:tgtEl>
-                                        <p:attrNameLst>
-                                          <p:attrName>style.visibility</p:attrName>
-                                        </p:attrNameLst>
-                                      </p:cBhvr>
-                                      <p:to>
-                                        <p:strVal val="visible"/>
-                                      </p:to>
-                                    </p:set>
-                                    <p:animEffect transition="in" filter="fade">
-                                      <p:cBhvr>
-                                        <p:cTn id="37" dur="500"/>
-                                        <p:tgtEl>
-                                          <p:spTgt spid="12"/>
-                                        </p:tgtEl>
-                                      </p:cBhvr>
-                                    </p:animEffect>
-                                  </p:childTnLst>
-                                </p:cTn>
-                              </p:par>
-                              <p:par>
-                                <p:cTn id="38" presetID="10" presetClass="entr" presetSubtype="0" fill="hold" grpId="0" nodeType="withEffect">
-                                  <p:stCondLst>
-                                    <p:cond delay="0"/>
-                                  </p:stCondLst>
-                                  <p:childTnLst>
-                                    <p:set>
-                                      <p:cBhvr>
-                                        <p:cTn id="39" dur="1" fill="hold">
-                                          <p:stCondLst>
-                                            <p:cond delay="0"/>
-                                          </p:stCondLst>
-                                        </p:cTn>
-                                        <p:tgtEl>
-                                          <p:spTgt spid="13"/>
-                                        </p:tgtEl>
-                                        <p:attrNameLst>
-                                          <p:attrName>style.visibility</p:attrName>
-                                        </p:attrNameLst>
-                                      </p:cBhvr>
-                                      <p:to>
-                                        <p:strVal val="visible"/>
-                                      </p:to>
-                                    </p:set>
-                                    <p:animEffect transition="in" filter="fade">
-                                      <p:cBhvr>
-                                        <p:cTn id="40" dur="500"/>
-                                        <p:tgtEl>
-                                          <p:spTgt spid="13"/>
-                                        </p:tgtEl>
-                                      </p:cBhvr>
-                                    </p:animEffect>
-                                  </p:childTnLst>
-                                </p:cTn>
-                              </p:par>
-                              <p:par>
-                                <p:cTn id="41" presetID="10" presetClass="entr" presetSubtype="0" fill="hold" grpId="0" nodeType="withEffect">
-                                  <p:stCondLst>
-                                    <p:cond delay="0"/>
-                                  </p:stCondLst>
-                                  <p:childTnLst>
-                                    <p:set>
-                                      <p:cBhvr>
-                                        <p:cTn id="42" dur="1" fill="hold">
-                                          <p:stCondLst>
-                                            <p:cond delay="0"/>
-                                          </p:stCondLst>
-                                        </p:cTn>
-                                        <p:tgtEl>
-                                          <p:spTgt spid="14"/>
-                                        </p:tgtEl>
-                                        <p:attrNameLst>
-                                          <p:attrName>style.visibility</p:attrName>
-                                        </p:attrNameLst>
-                                      </p:cBhvr>
-                                      <p:to>
-                                        <p:strVal val="visible"/>
-                                      </p:to>
-                                    </p:set>
-                                    <p:animEffect transition="in" filter="fade">
-                                      <p:cBhvr>
-                                        <p:cTn id="43" dur="500"/>
-                                        <p:tgtEl>
-                                          <p:spTgt spid="14"/>
-                                        </p:tgtEl>
-                                      </p:cBhvr>
-                                    </p:animEffect>
-                                  </p:childTnLst>
-                                </p:cTn>
-                              </p:par>
-                            </p:childTnLst>
-                          </p:cTn>
-                        </p:par>
-                      </p:childTnLst>
-                    </p:cTn>
-                  </p:par>
-                </p:childTnLst>
-              </p:cTn>
-              <p:prevCondLst>
-                <p:cond evt="onPrev" delay="0">
-                  <p:tgtEl>
-                    <p:sldTgt/>
-                  </p:tgtEl>
-                </p:cond>
-              </p:prevCondLst>
-              <p:nextCondLst>
-                <p:cond evt="onNext" delay="0">
-                  <p:tgtEl>
-                    <p:sldTgt/>
-                  </p:tgtEl>
-                </p:cond>
-              </p:nextCondLst>
-            </p:seq>
-          </p:childTnLst>
-        </p:cTn>
-      </p:par>
-    </p:tnLst>
-    <p:bldLst>
-      <p:bldP spid="2" grpId="0" animBg="1"/>
-      <p:bldP spid="3" grpId="0" animBg="1"/>
-      <p:bldP spid="4" grpId="0" animBg="1"/>
-      <p:bldP spid="5" grpId="0" animBg="1"/>
-      <p:bldP spid="6" grpId="0" animBg="1"/>
-      <p:bldP spid="9" grpId="0"/>
-      <p:bldP spid="10" grpId="0"/>
-      <p:bldP spid="11" grpId="0" animBg="1"/>
-      <p:bldP spid="12" grpId="0" animBg="1"/>
-      <p:bldP spid="13" grpId="0" animBg="1"/>
-      <p:bldP spid="14" grpId="0" animBg="1"/>
-    </p:bldLst>
-  </p:timing>
 </p:sld>
 </file>
 
@@ -17320,7 +17398,7 @@
                 <a:cs typeface="Plus Jakarta Sans ExtraBold"/>
                 <a:sym typeface="Plus Jakarta Sans ExtraBold"/>
               </a:rPr>
-              <a:t>Pianificazione</a:t>
+              <a:t>Concezione</a:t>
             </a:r>
             <a:r>
               <a:rPr lang="en-US" sz="3600" b="0" i="0" u="none" strike="noStrike" cap="none" dirty="0">
@@ -17449,6 +17527,286 @@
     </p:bg>
     <p:spTree>
       <p:nvGrpSpPr>
+        <p:cNvPr id="1" name="Shape 159">
+          <a:extLst>
+            <a:ext uri="{FF2B5EF4-FFF2-40B4-BE49-F238E27FC236}">
+              <a16:creationId xmlns:a16="http://schemas.microsoft.com/office/drawing/2014/main" id="{32B01040-0091-382A-98B3-90BA8A467BB1}"/>
+            </a:ext>
+          </a:extLst>
+        </p:cNvPr>
+        <p:cNvGrpSpPr/>
+        <p:nvPr/>
+      </p:nvGrpSpPr>
+      <p:grpSpPr>
+        <a:xfrm>
+          <a:off x="0" y="0"/>
+          <a:ext cx="0" cy="0"/>
+          <a:chOff x="0" y="0"/>
+          <a:chExt cx="0" cy="0"/>
+        </a:xfrm>
+      </p:grpSpPr>
+      <p:sp>
+        <p:nvSpPr>
+          <p:cNvPr id="163" name="Google Shape;163;p18">
+            <a:extLst>
+              <a:ext uri="{FF2B5EF4-FFF2-40B4-BE49-F238E27FC236}">
+                <a16:creationId xmlns:a16="http://schemas.microsoft.com/office/drawing/2014/main" id="{EF737607-E0E3-4256-CB80-CD9E694CD6F7}"/>
+              </a:ext>
+            </a:extLst>
+          </p:cNvPr>
+          <p:cNvSpPr txBox="1"/>
+          <p:nvPr/>
+        </p:nvSpPr>
+        <p:spPr>
+          <a:xfrm>
+            <a:off x="809625" y="571500"/>
+            <a:ext cx="11351418" cy="553998"/>
+          </a:xfrm>
+          <a:prstGeom prst="rect">
+            <a:avLst/>
+          </a:prstGeom>
+          <a:noFill/>
+          <a:ln>
+            <a:noFill/>
+          </a:ln>
+        </p:spPr>
+        <p:txBody>
+          <a:bodyPr spcFirstLastPara="1" wrap="square" lIns="0" tIns="0" rIns="0" bIns="0" anchor="t" anchorCtr="0">
+            <a:spAutoFit/>
+          </a:bodyPr>
+          <a:lstStyle/>
+          <a:p>
+            <a:pPr marL="0" marR="0" lvl="0" indent="0" algn="l" rtl="0">
+              <a:spcBef>
+                <a:spcPts val="0"/>
+              </a:spcBef>
+              <a:spcAft>
+                <a:spcPts val="0"/>
+              </a:spcAft>
+              <a:buNone/>
+            </a:pPr>
+            <a:r>
+              <a:rPr lang="en-US" sz="3600" b="0" i="0" u="none" strike="noStrike" cap="none" dirty="0" err="1">
+                <a:solidFill>
+                  <a:srgbClr val="8B5CF6"/>
+                </a:solidFill>
+                <a:latin typeface="Plus Jakarta Sans ExtraBold"/>
+                <a:ea typeface="Plus Jakarta Sans ExtraBold"/>
+                <a:cs typeface="Plus Jakarta Sans ExtraBold"/>
+                <a:sym typeface="Plus Jakarta Sans ExtraBold"/>
+              </a:rPr>
+              <a:t>Concezione</a:t>
+            </a:r>
+            <a:r>
+              <a:rPr lang="en-US" sz="3600" b="0" i="0" u="none" strike="noStrike" cap="none" dirty="0">
+                <a:solidFill>
+                  <a:srgbClr val="8B5CF6"/>
+                </a:solidFill>
+                <a:latin typeface="Plus Jakarta Sans ExtraBold"/>
+                <a:ea typeface="Plus Jakarta Sans ExtraBold"/>
+                <a:cs typeface="Plus Jakarta Sans ExtraBold"/>
+                <a:sym typeface="Plus Jakarta Sans ExtraBold"/>
+              </a:rPr>
+              <a:t> (</a:t>
+            </a:r>
+            <a:r>
+              <a:rPr lang="en-US" sz="3600" b="0" i="0" u="none" strike="noStrike" cap="none" dirty="0" err="1">
+                <a:solidFill>
+                  <a:srgbClr val="8B5CF6"/>
+                </a:solidFill>
+                <a:latin typeface="Plus Jakarta Sans ExtraBold"/>
+                <a:ea typeface="Plus Jakarta Sans ExtraBold"/>
+                <a:cs typeface="Plus Jakarta Sans ExtraBold"/>
+                <a:sym typeface="Plus Jakarta Sans ExtraBold"/>
+              </a:rPr>
+              <a:t>Documentazione</a:t>
+            </a:r>
+            <a:r>
+              <a:rPr lang="en-US" sz="3600" b="0" i="0" u="none" strike="noStrike" cap="none" dirty="0">
+                <a:solidFill>
+                  <a:srgbClr val="8B5CF6"/>
+                </a:solidFill>
+                <a:latin typeface="Plus Jakarta Sans ExtraBold"/>
+                <a:ea typeface="Plus Jakarta Sans ExtraBold"/>
+                <a:cs typeface="Plus Jakarta Sans ExtraBold"/>
+                <a:sym typeface="Plus Jakarta Sans ExtraBold"/>
+              </a:rPr>
+              <a:t>)</a:t>
+            </a:r>
+            <a:endParaRPr dirty="0"/>
+          </a:p>
+        </p:txBody>
+      </p:sp>
+      <p:sp>
+        <p:nvSpPr>
+          <p:cNvPr id="164" name="Google Shape;164;p18">
+            <a:extLst>
+              <a:ext uri="{FF2B5EF4-FFF2-40B4-BE49-F238E27FC236}">
+                <a16:creationId xmlns:a16="http://schemas.microsoft.com/office/drawing/2014/main" id="{F9148A2D-621E-0007-74D9-C082C70681CC}"/>
+              </a:ext>
+            </a:extLst>
+          </p:cNvPr>
+          <p:cNvSpPr/>
+          <p:nvPr/>
+        </p:nvSpPr>
+        <p:spPr>
+          <a:xfrm>
+            <a:off x="571500" y="571500"/>
+            <a:ext cx="95250" cy="581025"/>
+          </a:xfrm>
+          <a:prstGeom prst="rect">
+            <a:avLst/>
+          </a:prstGeom>
+          <a:solidFill>
+            <a:srgbClr val="EC4899"/>
+          </a:solidFill>
+          <a:ln>
+            <a:noFill/>
+          </a:ln>
+        </p:spPr>
+        <p:txBody>
+          <a:bodyPr spcFirstLastPara="1" wrap="square" lIns="91425" tIns="45700" rIns="91425" bIns="45700" anchor="ctr" anchorCtr="0">
+            <a:noAutofit/>
+          </a:bodyPr>
+          <a:lstStyle/>
+          <a:p>
+            <a:pPr marL="0" marR="0" lvl="0" indent="0" algn="ctr" rtl="0">
+              <a:spcBef>
+                <a:spcPts val="0"/>
+              </a:spcBef>
+              <a:spcAft>
+                <a:spcPts val="0"/>
+              </a:spcAft>
+              <a:buNone/>
+            </a:pPr>
+            <a:endParaRPr sz="1800" b="0" i="0" u="none" strike="noStrike" cap="none">
+              <a:solidFill>
+                <a:schemeClr val="dk1"/>
+              </a:solidFill>
+              <a:latin typeface="Calibri"/>
+              <a:ea typeface="Calibri"/>
+              <a:cs typeface="Calibri"/>
+              <a:sym typeface="Calibri"/>
+            </a:endParaRPr>
+          </a:p>
+        </p:txBody>
+      </p:sp>
+      <p:pic>
+        <p:nvPicPr>
+          <p:cNvPr id="3" name="Picture 2">
+            <a:extLst>
+              <a:ext uri="{FF2B5EF4-FFF2-40B4-BE49-F238E27FC236}">
+                <a16:creationId xmlns:a16="http://schemas.microsoft.com/office/drawing/2014/main" id="{353FAEF8-1FFB-5BC1-97D6-CDF8A614AE71}"/>
+              </a:ext>
+            </a:extLst>
+          </p:cNvPr>
+          <p:cNvPicPr>
+            <a:picLocks noChangeAspect="1"/>
+          </p:cNvPicPr>
+          <p:nvPr/>
+        </p:nvPicPr>
+        <p:blipFill>
+          <a:blip r:embed="rId3"/>
+          <a:stretch>
+            <a:fillRect/>
+          </a:stretch>
+        </p:blipFill>
+        <p:spPr>
+          <a:xfrm>
+            <a:off x="469374" y="1578762"/>
+            <a:ext cx="3452269" cy="4469915"/>
+          </a:xfrm>
+          <a:prstGeom prst="rect">
+            <a:avLst/>
+          </a:prstGeom>
+        </p:spPr>
+      </p:pic>
+      <p:pic>
+        <p:nvPicPr>
+          <p:cNvPr id="6" name="Picture 5">
+            <a:extLst>
+              <a:ext uri="{FF2B5EF4-FFF2-40B4-BE49-F238E27FC236}">
+                <a16:creationId xmlns:a16="http://schemas.microsoft.com/office/drawing/2014/main" id="{F24F8243-CA7A-8BC3-F5E4-98129906C8DD}"/>
+              </a:ext>
+            </a:extLst>
+          </p:cNvPr>
+          <p:cNvPicPr>
+            <a:picLocks noChangeAspect="1"/>
+          </p:cNvPicPr>
+          <p:nvPr/>
+        </p:nvPicPr>
+        <p:blipFill>
+          <a:blip r:embed="rId4"/>
+          <a:stretch>
+            <a:fillRect/>
+          </a:stretch>
+        </p:blipFill>
+        <p:spPr>
+          <a:xfrm>
+            <a:off x="4375799" y="1578762"/>
+            <a:ext cx="3452269" cy="4469915"/>
+          </a:xfrm>
+          <a:prstGeom prst="rect">
+            <a:avLst/>
+          </a:prstGeom>
+        </p:spPr>
+      </p:pic>
+      <p:pic>
+        <p:nvPicPr>
+          <p:cNvPr id="8" name="Picture 7">
+            <a:extLst>
+              <a:ext uri="{FF2B5EF4-FFF2-40B4-BE49-F238E27FC236}">
+                <a16:creationId xmlns:a16="http://schemas.microsoft.com/office/drawing/2014/main" id="{FE8E022D-E238-FA2E-265D-9BB1160FFABA}"/>
+              </a:ext>
+            </a:extLst>
+          </p:cNvPr>
+          <p:cNvPicPr>
+            <a:picLocks noChangeAspect="1"/>
+          </p:cNvPicPr>
+          <p:nvPr/>
+        </p:nvPicPr>
+        <p:blipFill>
+          <a:blip r:embed="rId5"/>
+          <a:stretch>
+            <a:fillRect/>
+          </a:stretch>
+        </p:blipFill>
+        <p:spPr>
+          <a:xfrm>
+            <a:off x="8282225" y="1581965"/>
+            <a:ext cx="3440401" cy="4466712"/>
+          </a:xfrm>
+          <a:prstGeom prst="rect">
+            <a:avLst/>
+          </a:prstGeom>
+        </p:spPr>
+      </p:pic>
+    </p:spTree>
+    <p:extLst>
+      <p:ext uri="{BB962C8B-B14F-4D97-AF65-F5344CB8AC3E}">
+        <p14:creationId xmlns:p14="http://schemas.microsoft.com/office/powerpoint/2010/main" val="309742893"/>
+      </p:ext>
+    </p:extLst>
+  </p:cSld>
+  <p:clrMapOvr>
+    <a:masterClrMapping/>
+  </p:clrMapOvr>
+</p:sld>
+</file>
+
+<file path=ppt/slides/slide8.xml><?xml version="1.0" encoding="utf-8"?>
+<p:sld xmlns:a="http://schemas.openxmlformats.org/drawingml/2006/main" xmlns:r="http://schemas.openxmlformats.org/officeDocument/2006/relationships" xmlns:p="http://schemas.openxmlformats.org/presentationml/2006/main">
+  <p:cSld>
+    <p:bg>
+      <p:bgPr>
+        <a:solidFill>
+          <a:srgbClr val="0F172A"/>
+        </a:solidFill>
+        <a:effectLst/>
+      </p:bgPr>
+    </p:bg>
+    <p:spTree>
+      <p:nvGrpSpPr>
         <p:cNvPr id="1" name="Shape 159"/>
         <p:cNvGrpSpPr/>
         <p:nvPr/>
@@ -17470,7 +17828,7 @@
         <p:spPr>
           <a:xfrm>
             <a:off x="809625" y="571500"/>
-            <a:ext cx="11351418" cy="581025"/>
+            <a:ext cx="11351418" cy="553998"/>
           </a:xfrm>
           <a:prstGeom prst="rect">
             <a:avLst/>
@@ -17496,7 +17854,7 @@
               <a:buNone/>
             </a:pPr>
             <a:r>
-              <a:rPr lang="en-US" sz="3600" b="0" i="0" u="none" strike="noStrike" cap="none">
+              <a:rPr lang="en-US" sz="3600" b="0" i="0" u="none" strike="noStrike" cap="none" dirty="0" err="1">
                 <a:solidFill>
                   <a:srgbClr val="8B5CF6"/>
                 </a:solidFill>
@@ -17505,9 +17863,21 @@
                 <a:cs typeface="Plus Jakarta Sans ExtraBold"/>
                 <a:sym typeface="Plus Jakarta Sans ExtraBold"/>
               </a:rPr>
-              <a:t>Pianificazione (Gantt)</a:t>
+              <a:t>Concezione</a:t>
             </a:r>
-            <a:endParaRPr/>
+            <a:r>
+              <a:rPr lang="en-US" sz="3600" b="0" i="0" u="none" strike="noStrike" cap="none" dirty="0">
+                <a:solidFill>
+                  <a:srgbClr val="8B5CF6"/>
+                </a:solidFill>
+                <a:latin typeface="Plus Jakarta Sans ExtraBold"/>
+                <a:ea typeface="Plus Jakarta Sans ExtraBold"/>
+                <a:cs typeface="Plus Jakarta Sans ExtraBold"/>
+                <a:sym typeface="Plus Jakarta Sans ExtraBold"/>
+              </a:rPr>
+              <a:t> (Gantt)</a:t>
+            </a:r>
+            <a:endParaRPr dirty="0"/>
           </a:p>
         </p:txBody>
       </p:sp>
@@ -17597,7 +17967,7 @@
 </p:sld>
 </file>
 
-<file path=ppt/slides/slide8.xml><?xml version="1.0" encoding="utf-8"?>
+<file path=ppt/slides/slide9.xml><?xml version="1.0" encoding="utf-8"?>
 <p:sld xmlns:a="http://schemas.openxmlformats.org/drawingml/2006/main" xmlns:r="http://schemas.openxmlformats.org/officeDocument/2006/relationships" xmlns:p="http://schemas.openxmlformats.org/presentationml/2006/main">
   <p:cSld>
     <p:bg>
@@ -17773,472 +18143,6 @@
           </a:p>
         </p:txBody>
       </p:sp>
-    </p:spTree>
-  </p:cSld>
-  <p:clrMapOvr>
-    <a:masterClrMapping/>
-  </p:clrMapOvr>
-</p:sld>
-</file>
-
-<file path=ppt/slides/slide9.xml><?xml version="1.0" encoding="utf-8"?>
-<p:sld xmlns:a="http://schemas.openxmlformats.org/drawingml/2006/main" xmlns:r="http://schemas.openxmlformats.org/officeDocument/2006/relationships" xmlns:p="http://schemas.openxmlformats.org/presentationml/2006/main">
-  <p:cSld>
-    <p:bg>
-      <p:bgPr>
-        <a:solidFill>
-          <a:srgbClr val="0F172A"/>
-        </a:solidFill>
-        <a:effectLst/>
-      </p:bgPr>
-    </p:bg>
-    <p:spTree>
-      <p:nvGrpSpPr>
-        <p:cNvPr id="1" name="Shape 176"/>
-        <p:cNvGrpSpPr/>
-        <p:nvPr/>
-      </p:nvGrpSpPr>
-      <p:grpSpPr>
-        <a:xfrm>
-          <a:off x="0" y="0"/>
-          <a:ext cx="0" cy="0"/>
-          <a:chOff x="0" y="0"/>
-          <a:chExt cx="0" cy="0"/>
-        </a:xfrm>
-      </p:grpSpPr>
-      <p:sp>
-        <p:nvSpPr>
-          <p:cNvPr id="181" name="Google Shape;181;p20"/>
-          <p:cNvSpPr txBox="1"/>
-          <p:nvPr/>
-        </p:nvSpPr>
-        <p:spPr>
-          <a:xfrm>
-            <a:off x="571500" y="4814887"/>
-            <a:ext cx="3492549" cy="857250"/>
-          </a:xfrm>
-          <a:prstGeom prst="rect">
-            <a:avLst/>
-          </a:prstGeom>
-          <a:noFill/>
-          <a:ln>
-            <a:noFill/>
-          </a:ln>
-        </p:spPr>
-        <p:txBody>
-          <a:bodyPr spcFirstLastPara="1" wrap="square" lIns="0" tIns="0" rIns="0" bIns="0" anchor="t" anchorCtr="0">
-            <a:spAutoFit/>
-          </a:bodyPr>
-          <a:lstStyle/>
-          <a:p>
-            <a:pPr marL="0" marR="0" lvl="0" indent="0" algn="ctr" rtl="0">
-              <a:lnSpc>
-                <a:spcPct val="125000"/>
-              </a:lnSpc>
-              <a:spcBef>
-                <a:spcPts val="0"/>
-              </a:spcBef>
-              <a:spcAft>
-                <a:spcPts val="0"/>
-              </a:spcAft>
-              <a:buNone/>
-            </a:pPr>
-            <a:r>
-              <a:rPr lang="en-US" sz="1500" b="1" i="0" u="none" strike="noStrike" cap="none">
-                <a:solidFill>
-                  <a:srgbClr val="CBD5E1"/>
-                </a:solidFill>
-                <a:latin typeface="Plus Jakarta Sans"/>
-                <a:ea typeface="Plus Jakarta Sans"/>
-                <a:cs typeface="Plus Jakarta Sans"/>
-                <a:sym typeface="Plus Jakarta Sans"/>
-              </a:rPr>
-              <a:t>Step 1: Bozza</a:t>
-            </a:r>
-            <a:br>
-              <a:rPr lang="en-US" sz="1800" b="0" i="0" u="none" strike="noStrike" cap="none">
-                <a:solidFill>
-                  <a:schemeClr val="dk1"/>
-                </a:solidFill>
-                <a:latin typeface="Calibri"/>
-                <a:ea typeface="Calibri"/>
-                <a:cs typeface="Calibri"/>
-                <a:sym typeface="Calibri"/>
-              </a:rPr>
-            </a:br>
-            <a:r>
-              <a:rPr lang="en-US" sz="1500" b="0" i="0" u="none" strike="noStrike" cap="none">
-                <a:solidFill>
-                  <a:srgbClr val="CBD5E1"/>
-                </a:solidFill>
-                <a:latin typeface="Plus Jakarta Sans"/>
-                <a:ea typeface="Plus Jakarta Sans"/>
-                <a:cs typeface="Plus Jakarta Sans"/>
-                <a:sym typeface="Plus Jakarta Sans"/>
-              </a:rPr>
-              <a:t> Schizzi manuali per definire i flussi utente.</a:t>
-            </a:r>
-            <a:endParaRPr/>
-          </a:p>
-        </p:txBody>
-      </p:sp>
-      <p:sp>
-        <p:nvSpPr>
-          <p:cNvPr id="182" name="Google Shape;182;p20"/>
-          <p:cNvSpPr txBox="1"/>
-          <p:nvPr/>
-        </p:nvSpPr>
-        <p:spPr>
-          <a:xfrm>
-            <a:off x="4349799" y="4814887"/>
-            <a:ext cx="3492549" cy="571500"/>
-          </a:xfrm>
-          <a:prstGeom prst="rect">
-            <a:avLst/>
-          </a:prstGeom>
-          <a:noFill/>
-          <a:ln>
-            <a:noFill/>
-          </a:ln>
-        </p:spPr>
-        <p:txBody>
-          <a:bodyPr spcFirstLastPara="1" wrap="square" lIns="0" tIns="0" rIns="0" bIns="0" anchor="t" anchorCtr="0">
-            <a:spAutoFit/>
-          </a:bodyPr>
-          <a:lstStyle/>
-          <a:p>
-            <a:pPr marL="0" marR="0" lvl="0" indent="0" algn="ctr" rtl="0">
-              <a:lnSpc>
-                <a:spcPct val="125000"/>
-              </a:lnSpc>
-              <a:spcBef>
-                <a:spcPts val="0"/>
-              </a:spcBef>
-              <a:spcAft>
-                <a:spcPts val="0"/>
-              </a:spcAft>
-              <a:buNone/>
-            </a:pPr>
-            <a:r>
-              <a:rPr lang="en-US" sz="1500" b="1" i="0" u="none" strike="noStrike" cap="none">
-                <a:solidFill>
-                  <a:srgbClr val="CBD5E1"/>
-                </a:solidFill>
-                <a:latin typeface="Plus Jakarta Sans"/>
-                <a:ea typeface="Plus Jakarta Sans"/>
-                <a:cs typeface="Plus Jakarta Sans"/>
-                <a:sym typeface="Plus Jakarta Sans"/>
-              </a:rPr>
-              <a:t>Step 2: Figma</a:t>
-            </a:r>
-            <a:br>
-              <a:rPr lang="en-US" sz="1800" b="0" i="0" u="none" strike="noStrike" cap="none">
-                <a:solidFill>
-                  <a:schemeClr val="dk1"/>
-                </a:solidFill>
-                <a:latin typeface="Calibri"/>
-                <a:ea typeface="Calibri"/>
-                <a:cs typeface="Calibri"/>
-                <a:sym typeface="Calibri"/>
-              </a:rPr>
-            </a:br>
-            <a:r>
-              <a:rPr lang="en-US" sz="1500" b="0" i="0" u="none" strike="noStrike" cap="none">
-                <a:solidFill>
-                  <a:srgbClr val="CBD5E1"/>
-                </a:solidFill>
-                <a:latin typeface="Plus Jakarta Sans"/>
-                <a:ea typeface="Plus Jakarta Sans"/>
-                <a:cs typeface="Plus Jakarta Sans"/>
-                <a:sym typeface="Plus Jakarta Sans"/>
-              </a:rPr>
-              <a:t> Progettazione UI/UX ad alta fedeltà.</a:t>
-            </a:r>
-            <a:endParaRPr/>
-          </a:p>
-        </p:txBody>
-      </p:sp>
-      <p:sp>
-        <p:nvSpPr>
-          <p:cNvPr id="183" name="Google Shape;183;p20"/>
-          <p:cNvSpPr txBox="1"/>
-          <p:nvPr/>
-        </p:nvSpPr>
-        <p:spPr>
-          <a:xfrm>
-            <a:off x="8128099" y="4814887"/>
-            <a:ext cx="3492549" cy="571500"/>
-          </a:xfrm>
-          <a:prstGeom prst="rect">
-            <a:avLst/>
-          </a:prstGeom>
-          <a:noFill/>
-          <a:ln>
-            <a:noFill/>
-          </a:ln>
-        </p:spPr>
-        <p:txBody>
-          <a:bodyPr spcFirstLastPara="1" wrap="square" lIns="0" tIns="0" rIns="0" bIns="0" anchor="t" anchorCtr="0">
-            <a:spAutoFit/>
-          </a:bodyPr>
-          <a:lstStyle/>
-          <a:p>
-            <a:pPr marL="0" marR="0" lvl="0" indent="0" algn="ctr" rtl="0">
-              <a:lnSpc>
-                <a:spcPct val="125000"/>
-              </a:lnSpc>
-              <a:spcBef>
-                <a:spcPts val="0"/>
-              </a:spcBef>
-              <a:spcAft>
-                <a:spcPts val="0"/>
-              </a:spcAft>
-              <a:buNone/>
-            </a:pPr>
-            <a:r>
-              <a:rPr lang="en-US" sz="1500" b="1" i="0" u="none" strike="noStrike" cap="none">
-                <a:solidFill>
-                  <a:srgbClr val="CBD5E1"/>
-                </a:solidFill>
-                <a:latin typeface="Plus Jakarta Sans"/>
-                <a:ea typeface="Plus Jakarta Sans"/>
-                <a:cs typeface="Plus Jakarta Sans"/>
-                <a:sym typeface="Plus Jakarta Sans"/>
-              </a:rPr>
-              <a:t>Step 3: Prototipo</a:t>
-            </a:r>
-            <a:br>
-              <a:rPr lang="en-US" sz="1800" b="0" i="0" u="none" strike="noStrike" cap="none">
-                <a:solidFill>
-                  <a:schemeClr val="dk1"/>
-                </a:solidFill>
-                <a:latin typeface="Calibri"/>
-                <a:ea typeface="Calibri"/>
-                <a:cs typeface="Calibri"/>
-                <a:sym typeface="Calibri"/>
-              </a:rPr>
-            </a:br>
-            <a:r>
-              <a:rPr lang="en-US" sz="1500" b="0" i="0" u="none" strike="noStrike" cap="none">
-                <a:solidFill>
-                  <a:srgbClr val="CBD5E1"/>
-                </a:solidFill>
-                <a:latin typeface="Plus Jakarta Sans"/>
-                <a:ea typeface="Plus Jakarta Sans"/>
-                <a:cs typeface="Plus Jakarta Sans"/>
-                <a:sym typeface="Plus Jakarta Sans"/>
-              </a:rPr>
-              <a:t> Validazione della struttura dell'orario.</a:t>
-            </a:r>
-            <a:endParaRPr/>
-          </a:p>
-        </p:txBody>
-      </p:sp>
-      <p:sp>
-        <p:nvSpPr>
-          <p:cNvPr id="187" name="Google Shape;187;p20"/>
-          <p:cNvSpPr txBox="1"/>
-          <p:nvPr/>
-        </p:nvSpPr>
-        <p:spPr>
-          <a:xfrm>
-            <a:off x="809625" y="571500"/>
-            <a:ext cx="11351418" cy="581025"/>
-          </a:xfrm>
-          <a:prstGeom prst="rect">
-            <a:avLst/>
-          </a:prstGeom>
-          <a:noFill/>
-          <a:ln>
-            <a:noFill/>
-          </a:ln>
-        </p:spPr>
-        <p:txBody>
-          <a:bodyPr spcFirstLastPara="1" wrap="square" lIns="0" tIns="0" rIns="0" bIns="0" anchor="t" anchorCtr="0">
-            <a:spAutoFit/>
-          </a:bodyPr>
-          <a:lstStyle/>
-          <a:p>
-            <a:pPr marL="0" marR="0" lvl="0" indent="0" algn="l" rtl="0">
-              <a:spcBef>
-                <a:spcPts val="0"/>
-              </a:spcBef>
-              <a:spcAft>
-                <a:spcPts val="0"/>
-              </a:spcAft>
-              <a:buNone/>
-            </a:pPr>
-            <a:r>
-              <a:rPr lang="en-US" sz="3600" b="0" i="0" u="none" strike="noStrike" cap="none">
-                <a:solidFill>
-                  <a:srgbClr val="8B5CF6"/>
-                </a:solidFill>
-                <a:latin typeface="Plus Jakarta Sans ExtraBold"/>
-                <a:ea typeface="Plus Jakarta Sans ExtraBold"/>
-                <a:cs typeface="Plus Jakarta Sans ExtraBold"/>
-                <a:sym typeface="Plus Jakarta Sans ExtraBold"/>
-              </a:rPr>
-              <a:t>Iterazione del Design</a:t>
-            </a:r>
-            <a:endParaRPr/>
-          </a:p>
-        </p:txBody>
-      </p:sp>
-      <p:sp>
-        <p:nvSpPr>
-          <p:cNvPr id="188" name="Google Shape;188;p20"/>
-          <p:cNvSpPr/>
-          <p:nvPr/>
-        </p:nvSpPr>
-        <p:spPr>
-          <a:xfrm>
-            <a:off x="571500" y="571500"/>
-            <a:ext cx="95250" cy="581025"/>
-          </a:xfrm>
-          <a:prstGeom prst="rect">
-            <a:avLst/>
-          </a:prstGeom>
-          <a:solidFill>
-            <a:srgbClr val="EC4899"/>
-          </a:solidFill>
-          <a:ln>
-            <a:noFill/>
-          </a:ln>
-        </p:spPr>
-        <p:txBody>
-          <a:bodyPr spcFirstLastPara="1" wrap="square" lIns="91425" tIns="45700" rIns="91425" bIns="45700" anchor="ctr" anchorCtr="0">
-            <a:noAutofit/>
-          </a:bodyPr>
-          <a:lstStyle/>
-          <a:p>
-            <a:pPr marL="0" marR="0" lvl="0" indent="0" algn="ctr" rtl="0">
-              <a:spcBef>
-                <a:spcPts val="0"/>
-              </a:spcBef>
-              <a:spcAft>
-                <a:spcPts val="0"/>
-              </a:spcAft>
-              <a:buNone/>
-            </a:pPr>
-            <a:endParaRPr sz="1800" b="0" i="0" u="none" strike="noStrike" cap="none">
-              <a:solidFill>
-                <a:schemeClr val="dk1"/>
-              </a:solidFill>
-              <a:latin typeface="Calibri"/>
-              <a:ea typeface="Calibri"/>
-              <a:cs typeface="Calibri"/>
-              <a:sym typeface="Calibri"/>
-            </a:endParaRPr>
-          </a:p>
-        </p:txBody>
-      </p:sp>
-      <p:pic>
-        <p:nvPicPr>
-          <p:cNvPr id="1032" name="Picture 8" descr="Pengertian Figma, Membahas Fitur dan Harga - TokoWeb.co">
-            <a:extLst>
-              <a:ext uri="{FF2B5EF4-FFF2-40B4-BE49-F238E27FC236}">
-                <a16:creationId xmlns:a16="http://schemas.microsoft.com/office/drawing/2014/main" id="{2B6EDE24-DFF5-EC88-DE95-C94816A2CE3C}"/>
-              </a:ext>
-            </a:extLst>
-          </p:cNvPr>
-          <p:cNvPicPr>
-            <a:picLocks noChangeAspect="1" noChangeArrowheads="1"/>
-          </p:cNvPicPr>
-          <p:nvPr/>
-        </p:nvPicPr>
-        <p:blipFill rotWithShape="1">
-          <a:blip r:embed="rId3">
-            <a:extLst>
-              <a:ext uri="{28A0092B-C50C-407E-A947-70E740481C1C}">
-                <a14:useLocalDpi xmlns:a14="http://schemas.microsoft.com/office/drawing/2010/main" val="0"/>
-              </a:ext>
-            </a:extLst>
-          </a:blip>
-          <a:srcRect l="10505" r="14701"/>
-          <a:stretch>
-            <a:fillRect/>
-          </a:stretch>
-        </p:blipFill>
-        <p:spPr bwMode="auto">
-          <a:xfrm>
-            <a:off x="4294520" y="1941565"/>
-            <a:ext cx="3547828" cy="2667000"/>
-          </a:xfrm>
-          <a:prstGeom prst="rect">
-            <a:avLst/>
-          </a:prstGeom>
-          <a:noFill/>
-          <a:extLst>
-            <a:ext uri="{909E8E84-426E-40DD-AFC4-6F175D3DCCD1}">
-              <a14:hiddenFill xmlns:a14="http://schemas.microsoft.com/office/drawing/2010/main">
-                <a:solidFill>
-                  <a:srgbClr val="FFFFFF"/>
-                </a:solidFill>
-              </a14:hiddenFill>
-            </a:ext>
-          </a:extLst>
-        </p:spPr>
-      </p:pic>
-      <p:pic>
-        <p:nvPicPr>
-          <p:cNvPr id="7" name="Picture 6">
-            <a:extLst>
-              <a:ext uri="{FF2B5EF4-FFF2-40B4-BE49-F238E27FC236}">
-                <a16:creationId xmlns:a16="http://schemas.microsoft.com/office/drawing/2014/main" id="{AE38E2CE-3562-E780-0CFC-07A276BEF6F4}"/>
-              </a:ext>
-            </a:extLst>
-          </p:cNvPr>
-          <p:cNvPicPr>
-            <a:picLocks noChangeAspect="1"/>
-          </p:cNvPicPr>
-          <p:nvPr/>
-        </p:nvPicPr>
-        <p:blipFill>
-          <a:blip r:embed="rId4"/>
-          <a:stretch>
-            <a:fillRect/>
-          </a:stretch>
-        </p:blipFill>
-        <p:spPr>
-          <a:xfrm>
-            <a:off x="814064" y="1966912"/>
-            <a:ext cx="3007420" cy="2641653"/>
-          </a:xfrm>
-          <a:prstGeom prst="rect">
-            <a:avLst/>
-          </a:prstGeom>
-        </p:spPr>
-      </p:pic>
-      <p:pic>
-        <p:nvPicPr>
-          <p:cNvPr id="9" name="Picture 8">
-            <a:extLst>
-              <a:ext uri="{FF2B5EF4-FFF2-40B4-BE49-F238E27FC236}">
-                <a16:creationId xmlns:a16="http://schemas.microsoft.com/office/drawing/2014/main" id="{9487BD25-22A9-2AA6-528A-083825CB6905}"/>
-              </a:ext>
-            </a:extLst>
-          </p:cNvPr>
-          <p:cNvPicPr>
-            <a:picLocks noChangeAspect="1"/>
-          </p:cNvPicPr>
-          <p:nvPr/>
-        </p:nvPicPr>
-        <p:blipFill>
-          <a:blip r:embed="rId5"/>
-          <a:stretch>
-            <a:fillRect/>
-          </a:stretch>
-        </p:blipFill>
-        <p:spPr>
-          <a:xfrm>
-            <a:off x="8128099" y="1982345"/>
-            <a:ext cx="3249837" cy="2626220"/>
-          </a:xfrm>
-          <a:prstGeom prst="rect">
-            <a:avLst/>
-          </a:prstGeom>
-        </p:spPr>
-      </p:pic>
     </p:spTree>
   </p:cSld>
   <p:clrMapOvr>
